--- a/backend/template/original_template.pptx
+++ b/backend/template/original_template.pptx
@@ -3915,7 +3915,7 @@
         </p:nvSpPr>
         <p:spPr>
           <a:xfrm rot="-10800000">
-            <a:off x="3155412" y="7985492"/>
+            <a:off x="3125817" y="7998095"/>
             <a:ext cx="1079875" cy="704618"/>
           </a:xfrm>
           <a:custGeom>
@@ -3962,7 +3962,7 @@
           <a:bodyPr/>
           <a:lstStyle/>
           <a:p>
-            <a:endParaRPr lang="LID4096"/>
+            <a:endParaRPr lang="LID4096" dirty="0"/>
           </a:p>
         </p:txBody>
       </p:sp>
